--- a/figures/edited/figS3_edited.pptx
+++ b/figures/edited/figS3_edited.pptx
@@ -243,7 +243,7 @@
           <a:p>
             <a:fld id="{9846A748-8F43-1948-93A2-534F40B96D47}" type="datetimeFigureOut">
               <a:rPr lang="en-US" smtClean="0"/>
-              <a:t>6/17/26</a:t>
+              <a:t>6/18/26</a:t>
             </a:fld>
             <a:endParaRPr lang="en-US"/>
           </a:p>
@@ -413,7 +413,7 @@
           <a:p>
             <a:fld id="{9846A748-8F43-1948-93A2-534F40B96D47}" type="datetimeFigureOut">
               <a:rPr lang="en-US" smtClean="0"/>
-              <a:t>6/17/26</a:t>
+              <a:t>6/18/26</a:t>
             </a:fld>
             <a:endParaRPr lang="en-US"/>
           </a:p>
@@ -593,7 +593,7 @@
           <a:p>
             <a:fld id="{9846A748-8F43-1948-93A2-534F40B96D47}" type="datetimeFigureOut">
               <a:rPr lang="en-US" smtClean="0"/>
-              <a:t>6/17/26</a:t>
+              <a:t>6/18/26</a:t>
             </a:fld>
             <a:endParaRPr lang="en-US"/>
           </a:p>
@@ -763,7 +763,7 @@
           <a:p>
             <a:fld id="{9846A748-8F43-1948-93A2-534F40B96D47}" type="datetimeFigureOut">
               <a:rPr lang="en-US" smtClean="0"/>
-              <a:t>6/17/26</a:t>
+              <a:t>6/18/26</a:t>
             </a:fld>
             <a:endParaRPr lang="en-US"/>
           </a:p>
@@ -1009,7 +1009,7 @@
           <a:p>
             <a:fld id="{9846A748-8F43-1948-93A2-534F40B96D47}" type="datetimeFigureOut">
               <a:rPr lang="en-US" smtClean="0"/>
-              <a:t>6/17/26</a:t>
+              <a:t>6/18/26</a:t>
             </a:fld>
             <a:endParaRPr lang="en-US"/>
           </a:p>
@@ -1241,7 +1241,7 @@
           <a:p>
             <a:fld id="{9846A748-8F43-1948-93A2-534F40B96D47}" type="datetimeFigureOut">
               <a:rPr lang="en-US" smtClean="0"/>
-              <a:t>6/17/26</a:t>
+              <a:t>6/18/26</a:t>
             </a:fld>
             <a:endParaRPr lang="en-US"/>
           </a:p>
@@ -1608,7 +1608,7 @@
           <a:p>
             <a:fld id="{9846A748-8F43-1948-93A2-534F40B96D47}" type="datetimeFigureOut">
               <a:rPr lang="en-US" smtClean="0"/>
-              <a:t>6/17/26</a:t>
+              <a:t>6/18/26</a:t>
             </a:fld>
             <a:endParaRPr lang="en-US"/>
           </a:p>
@@ -1726,7 +1726,7 @@
           <a:p>
             <a:fld id="{9846A748-8F43-1948-93A2-534F40B96D47}" type="datetimeFigureOut">
               <a:rPr lang="en-US" smtClean="0"/>
-              <a:t>6/17/26</a:t>
+              <a:t>6/18/26</a:t>
             </a:fld>
             <a:endParaRPr lang="en-US"/>
           </a:p>
@@ -1821,7 +1821,7 @@
           <a:p>
             <a:fld id="{9846A748-8F43-1948-93A2-534F40B96D47}" type="datetimeFigureOut">
               <a:rPr lang="en-US" smtClean="0"/>
-              <a:t>6/17/26</a:t>
+              <a:t>6/18/26</a:t>
             </a:fld>
             <a:endParaRPr lang="en-US"/>
           </a:p>
@@ -2098,7 +2098,7 @@
           <a:p>
             <a:fld id="{9846A748-8F43-1948-93A2-534F40B96D47}" type="datetimeFigureOut">
               <a:rPr lang="en-US" smtClean="0"/>
-              <a:t>6/17/26</a:t>
+              <a:t>6/18/26</a:t>
             </a:fld>
             <a:endParaRPr lang="en-US"/>
           </a:p>
@@ -2355,7 +2355,7 @@
           <a:p>
             <a:fld id="{9846A748-8F43-1948-93A2-534F40B96D47}" type="datetimeFigureOut">
               <a:rPr lang="en-US" smtClean="0"/>
-              <a:t>6/17/26</a:t>
+              <a:t>6/18/26</a:t>
             </a:fld>
             <a:endParaRPr lang="en-US"/>
           </a:p>
@@ -2568,7 +2568,7 @@
           <a:p>
             <a:fld id="{9846A748-8F43-1948-93A2-534F40B96D47}" type="datetimeFigureOut">
               <a:rPr lang="en-US" smtClean="0"/>
-              <a:t>6/17/26</a:t>
+              <a:t>6/18/26</a:t>
             </a:fld>
             <a:endParaRPr lang="en-US"/>
           </a:p>
@@ -3063,7 +3063,7 @@
                 <a:avLst/>
               </a:prstGeom>
               <a:solidFill>
-                <a:srgbClr val="E8E9FD"/>
+                <a:schemeClr val="accent3"/>
               </a:solidFill>
               <a:ln w="12700">
                 <a:solidFill>
@@ -3120,7 +3120,7 @@
                 <a:avLst/>
               </a:prstGeom>
               <a:solidFill>
-                <a:srgbClr val="E8E9FD"/>
+                <a:schemeClr val="accent3"/>
               </a:solidFill>
               <a:ln w="12700">
                 <a:solidFill>
@@ -3177,7 +3177,7 @@
                 <a:avLst/>
               </a:prstGeom>
               <a:solidFill>
-                <a:srgbClr val="E8E9FD"/>
+                <a:schemeClr val="accent3"/>
               </a:solidFill>
               <a:ln w="12700">
                 <a:solidFill>
@@ -3234,7 +3234,7 @@
                 <a:avLst/>
               </a:prstGeom>
               <a:solidFill>
-                <a:srgbClr val="E8E9FD"/>
+                <a:schemeClr val="accent3"/>
               </a:solidFill>
               <a:ln w="12700">
                 <a:solidFill>
@@ -3291,7 +3291,7 @@
                 <a:avLst/>
               </a:prstGeom>
               <a:solidFill>
-                <a:srgbClr val="E8E9FD"/>
+                <a:schemeClr val="accent3"/>
               </a:solidFill>
               <a:ln w="12700">
                 <a:solidFill>
@@ -3348,7 +3348,7 @@
                 <a:avLst/>
               </a:prstGeom>
               <a:solidFill>
-                <a:srgbClr val="E8E9FD"/>
+                <a:schemeClr val="accent3"/>
               </a:solidFill>
               <a:ln w="12700">
                 <a:solidFill>
@@ -3405,7 +3405,7 @@
                 <a:avLst/>
               </a:prstGeom>
               <a:solidFill>
-                <a:srgbClr val="E8E9FD"/>
+                <a:schemeClr val="accent3"/>
               </a:solidFill>
               <a:ln w="12700">
                 <a:solidFill>
@@ -3462,7 +3462,7 @@
                 <a:avLst/>
               </a:prstGeom>
               <a:solidFill>
-                <a:srgbClr val="D8AACE"/>
+                <a:schemeClr val="accent5"/>
               </a:solidFill>
               <a:ln w="12700">
                 <a:solidFill>
@@ -3519,7 +3519,7 @@
                 <a:avLst/>
               </a:prstGeom>
               <a:solidFill>
-                <a:srgbClr val="C4BBEC"/>
+                <a:schemeClr val="accent4"/>
               </a:solidFill>
               <a:ln w="12700">
                 <a:solidFill>
@@ -3551,7 +3551,7 @@
               <a:lstStyle/>
               <a:p>
                 <a:pPr algn="ctr"/>
-                <a:endParaRPr lang="en-US"/>
+                <a:endParaRPr lang="en-US" dirty="0"/>
               </a:p>
             </p:txBody>
           </p:sp>
@@ -3657,7 +3657,7 @@
                 <a:avLst/>
               </a:prstGeom>
               <a:solidFill>
-                <a:srgbClr val="E8E9FD"/>
+                <a:schemeClr val="accent3"/>
               </a:solidFill>
               <a:ln w="12700">
                 <a:solidFill>
@@ -3714,7 +3714,7 @@
                 <a:avLst/>
               </a:prstGeom>
               <a:solidFill>
-                <a:srgbClr val="E8E9FD"/>
+                <a:schemeClr val="accent3"/>
               </a:solidFill>
               <a:ln w="12700">
                 <a:solidFill>
@@ -3771,7 +3771,7 @@
                 <a:avLst/>
               </a:prstGeom>
               <a:solidFill>
-                <a:srgbClr val="E8E9FD"/>
+                <a:schemeClr val="accent3"/>
               </a:solidFill>
               <a:ln w="12700">
                 <a:solidFill>
@@ -3828,7 +3828,7 @@
                 <a:avLst/>
               </a:prstGeom>
               <a:solidFill>
-                <a:srgbClr val="E8E9FD"/>
+                <a:schemeClr val="accent3"/>
               </a:solidFill>
               <a:ln w="12700">
                 <a:solidFill>
@@ -3885,7 +3885,7 @@
                 <a:avLst/>
               </a:prstGeom>
               <a:solidFill>
-                <a:srgbClr val="E8E9FD"/>
+                <a:schemeClr val="accent3"/>
               </a:solidFill>
               <a:ln w="12700">
                 <a:solidFill>
@@ -3942,7 +3942,7 @@
                 <a:avLst/>
               </a:prstGeom>
               <a:solidFill>
-                <a:srgbClr val="E8E9FD"/>
+                <a:schemeClr val="accent3"/>
               </a:solidFill>
               <a:ln w="12700">
                 <a:solidFill>
@@ -3999,7 +3999,7 @@
                 <a:avLst/>
               </a:prstGeom>
               <a:solidFill>
-                <a:srgbClr val="E8E9FD"/>
+                <a:schemeClr val="accent3"/>
               </a:solidFill>
               <a:ln w="12700">
                 <a:solidFill>
@@ -4056,7 +4056,7 @@
                 <a:avLst/>
               </a:prstGeom>
               <a:solidFill>
-                <a:srgbClr val="D8AACE"/>
+                <a:schemeClr val="accent5"/>
               </a:solidFill>
               <a:ln w="12700">
                 <a:solidFill>
@@ -4113,7 +4113,7 @@
                 <a:avLst/>
               </a:prstGeom>
               <a:solidFill>
-                <a:srgbClr val="C4BBEC"/>
+                <a:schemeClr val="accent4"/>
               </a:solidFill>
               <a:ln w="12700">
                 <a:solidFill>
@@ -4282,12 +4282,12 @@
 <file path=ppt/theme/theme1.xml><?xml version="1.0" encoding="utf-8"?>
 <a:theme xmlns:a="http://schemas.openxmlformats.org/drawingml/2006/main" name="Office Theme">
   <a:themeElements>
-    <a:clrScheme name="Office Theme">
+    <a:clrScheme name="petri2">
       <a:dk1>
-        <a:sysClr val="windowText" lastClr="000000"/>
+        <a:srgbClr val="000000"/>
       </a:dk1>
       <a:lt1>
-        <a:sysClr val="window" lastClr="FFFFFF"/>
+        <a:srgbClr val="FFFFFF"/>
       </a:lt1>
       <a:dk2>
         <a:srgbClr val="0E2841"/>
@@ -4296,22 +4296,22 @@
         <a:srgbClr val="E8E8E8"/>
       </a:lt2>
       <a:accent1>
-        <a:srgbClr val="156082"/>
+        <a:srgbClr val="8A3F79"/>
       </a:accent1>
       <a:accent2>
-        <a:srgbClr val="E97132"/>
+        <a:srgbClr val="8294F5"/>
       </a:accent2>
       <a:accent3>
-        <a:srgbClr val="196B24"/>
+        <a:srgbClr val="E7E8FC"/>
       </a:accent3>
       <a:accent4>
-        <a:srgbClr val="0F9ED5"/>
+        <a:srgbClr val="CBADEA"/>
       </a:accent4>
       <a:accent5>
-        <a:srgbClr val="A02B93"/>
+        <a:srgbClr val="F5C3EF"/>
       </a:accent5>
       <a:accent6>
-        <a:srgbClr val="4EA72E"/>
+        <a:srgbClr val="FEEEBC"/>
       </a:accent6>
       <a:hlink>
         <a:srgbClr val="467886"/>
